--- a/data/deep_dives/carteira_fidc_auto_bv_4529e4d6/exports/documentary_comparison.pptx
+++ b/data/deep_dives/carteira_fidc_auto_bv_4529e4d6/exports/documentary_comparison.pptx
@@ -555,11 +555,6 @@
           </a:p>
           <a:p>
             <a:r>
-              <a:t>Auto IV da imagem: proposta sem CNPJ ou documento de suporte. Condições não verificadas; fora desta carteira.</a:t>
-            </a:r>
-          </a:p>
-          <a:p>
-            <a:r>
               <a:t>Fontes:</a:t>
             </a:r>
           </a:p>
@@ -756,11 +751,6 @@
           <a:p>
             <a:r>
               <a:t>ID CVM/Fundos.NET 1225635 · 2026-06-22 · data/raw/66929956000180/1225635_regulamento_regulamento_1225635_2026-06-22.pdf · p. 33–35,82–83 · 5.5;AdendoIPolíticaCrédito · https://fnet.bmfbovespa.com.br/fnet/publico/exibirDocumento?id=1225635&amp;cvm=true</a:t>
-            </a:r>
-          </a:p>
-          <a:p>
-            <a:r>
-              <a:t>Imagem IMG_1713.jpg fornecida pelo usuário</a:t>
             </a:r>
           </a:p>
         </p:txBody>
@@ -875,11 +865,6 @@
           </a:p>
           <a:p>
             <a:r>
-              <a:t>Auto IV da imagem: proposta sem CNPJ ou documento de suporte. Condições não verificadas; fora desta carteira.</a:t>
-            </a:r>
-          </a:p>
-          <a:p>
-            <a:r>
               <a:t>Fontes:</a:t>
             </a:r>
           </a:p>
@@ -1076,11 +1061,6 @@
           <a:p>
             <a:r>
               <a:t>ID CVM/Fundos.NET 1225635 · 2026-06-22 · data/raw/66929956000180/1225635_regulamento_regulamento_1225635_2026-06-22.pdf · p. 33–35,82–83 · 5.5;AdendoIPolíticaCrédito · https://fnet.bmfbovespa.com.br/fnet/publico/exibirDocumento?id=1225635&amp;cvm=true</a:t>
-            </a:r>
-          </a:p>
-          <a:p>
-            <a:r>
-              <a:t>Imagem IMG_1713.jpg fornecida pelo usuário</a:t>
             </a:r>
           </a:p>
         </p:txBody>
@@ -6630,7 +6610,7 @@
                       <a:r>
                         <a:rPr sz="1300" b="1">
                           <a:solidFill>
-                            <a:srgbClr val="1F1F1F"/>
+                            <a:srgbClr val="FFFFFF"/>
                           </a:solidFill>
                           <a:latin typeface="Calibri"/>
                         </a:rPr>
@@ -6640,7 +6620,7 @@
                   </a:txBody>
                   <a:tcPr marL="91440" marR="91440" marT="41148" marB="41148" anchor="ctr">
                     <a:solidFill>
-                      <a:srgbClr val="EC7000"/>
+                      <a:srgbClr val="FF6200"/>
                     </a:solidFill>
                     <a:lnL>
                       <a:noFill/>
@@ -6679,7 +6659,7 @@
                       <a:r>
                         <a:rPr sz="1300" b="1">
                           <a:solidFill>
-                            <a:srgbClr val="1F1F1F"/>
+                            <a:srgbClr val="FFFFFF"/>
                           </a:solidFill>
                           <a:latin typeface="Calibri"/>
                         </a:rPr>
@@ -6689,7 +6669,7 @@
                   </a:txBody>
                   <a:tcPr marL="91440" marR="91440" marT="41148" marB="41148" anchor="ctr">
                     <a:solidFill>
-                      <a:srgbClr val="EC7000"/>
+                      <a:srgbClr val="FF6200"/>
                     </a:solidFill>
                     <a:lnL>
                       <a:noFill/>
@@ -6728,7 +6708,7 @@
                       <a:r>
                         <a:rPr sz="1300" b="1">
                           <a:solidFill>
-                            <a:srgbClr val="1F1F1F"/>
+                            <a:srgbClr val="FFFFFF"/>
                           </a:solidFill>
                           <a:latin typeface="Calibri"/>
                         </a:rPr>
@@ -6738,7 +6718,7 @@
                   </a:txBody>
                   <a:tcPr marL="91440" marR="91440" marT="41148" marB="41148" anchor="ctr">
                     <a:solidFill>
-                      <a:srgbClr val="EC7000"/>
+                      <a:srgbClr val="FF6200"/>
                     </a:solidFill>
                     <a:lnL>
                       <a:noFill/>
@@ -6777,7 +6757,7 @@
                       <a:r>
                         <a:rPr sz="1300" b="1">
                           <a:solidFill>
-                            <a:srgbClr val="1F1F1F"/>
+                            <a:srgbClr val="FFFFFF"/>
                           </a:solidFill>
                           <a:latin typeface="Calibri"/>
                         </a:rPr>
@@ -6787,7 +6767,7 @@
                   </a:txBody>
                   <a:tcPr marL="91440" marR="91440" marT="41148" marB="41148" anchor="ctr">
                     <a:solidFill>
-                      <a:srgbClr val="EC7000"/>
+                      <a:srgbClr val="FF6200"/>
                     </a:solidFill>
                     <a:lnL>
                       <a:noFill/>
@@ -7727,7 +7707,7 @@
                           </a:solidFill>
                           <a:latin typeface="Calibri"/>
                         </a:rPr>
-                        <a:t>Vedação expressa não localizada</a:t>
+                        <a:t>-</a:t>
                       </a:r>
                     </a:p>
                   </a:txBody>
@@ -8244,8 +8224,8 @@
         </p:nvSpPr>
         <p:spPr>
           <a:xfrm>
-            <a:off x="438912" y="5632704"/>
-            <a:ext cx="11313871" cy="704088"/>
+            <a:off x="438912" y="5774436"/>
+            <a:ext cx="11313871" cy="562356"/>
           </a:xfrm>
           <a:prstGeom prst="rect">
             <a:avLst/>
@@ -8268,8 +8248,7 @@
               </a:rPr>
               <a:t>LTV na emissão da CCB: saldo presente / avaliação Molicar. Média ponderada; ponderador não explicitado.
 Ticket e Top 100 a valor presente, na aquisição. Limite por idade não localizado nos documentos acessíveis.
-Auto II: o regulamento prevê 1,90%–2,20% a.m. A DF de set/25 descreve 1,90%–2,05% a.m.; bases documentais distintas.
-Auto IV da imagem: proposta sem CNPJ ou documento de suporte. Condições não verificadas; fora desta carteira.</a:t>
+Auto II: o regulamento prevê 1,90%–2,20% a.m. A DF de set/25 descreve 1,90%–2,05% a.m.; bases documentais distintas.</a:t>
             </a:r>
           </a:p>
         </p:txBody>
@@ -8451,7 +8430,7 @@
                       <a:r>
                         <a:rPr sz="1300" b="1">
                           <a:solidFill>
-                            <a:srgbClr val="1F1F1F"/>
+                            <a:srgbClr val="FFFFFF"/>
                           </a:solidFill>
                           <a:latin typeface="Calibri"/>
                         </a:rPr>
@@ -8461,7 +8440,7 @@
                   </a:txBody>
                   <a:tcPr marL="91440" marR="91440" marT="41148" marB="41148" anchor="ctr">
                     <a:solidFill>
-                      <a:srgbClr val="EC7000"/>
+                      <a:srgbClr val="FF6200"/>
                     </a:solidFill>
                     <a:lnL>
                       <a:noFill/>
@@ -8500,7 +8479,7 @@
                       <a:r>
                         <a:rPr sz="1300" b="1">
                           <a:solidFill>
-                            <a:srgbClr val="1F1F1F"/>
+                            <a:srgbClr val="FFFFFF"/>
                           </a:solidFill>
                           <a:latin typeface="Calibri"/>
                         </a:rPr>
@@ -8510,7 +8489,7 @@
                   </a:txBody>
                   <a:tcPr marL="91440" marR="91440" marT="41148" marB="41148" anchor="ctr">
                     <a:solidFill>
-                      <a:srgbClr val="EC7000"/>
+                      <a:srgbClr val="FF6200"/>
                     </a:solidFill>
                     <a:lnL>
                       <a:noFill/>
@@ -8549,7 +8528,7 @@
                       <a:r>
                         <a:rPr sz="1300" b="1">
                           <a:solidFill>
-                            <a:srgbClr val="1F1F1F"/>
+                            <a:srgbClr val="FFFFFF"/>
                           </a:solidFill>
                           <a:latin typeface="Calibri"/>
                         </a:rPr>
@@ -8559,7 +8538,7 @@
                   </a:txBody>
                   <a:tcPr marL="91440" marR="91440" marT="41148" marB="41148" anchor="ctr">
                     <a:solidFill>
-                      <a:srgbClr val="EC7000"/>
+                      <a:srgbClr val="FF6200"/>
                     </a:solidFill>
                     <a:lnL>
                       <a:noFill/>
@@ -8598,7 +8577,7 @@
                       <a:r>
                         <a:rPr sz="1300" b="1">
                           <a:solidFill>
-                            <a:srgbClr val="1F1F1F"/>
+                            <a:srgbClr val="FFFFFF"/>
                           </a:solidFill>
                           <a:latin typeface="Calibri"/>
                         </a:rPr>
@@ -8608,7 +8587,7 @@
                   </a:txBody>
                   <a:tcPr marL="91440" marR="91440" marT="41148" marB="41148" anchor="ctr">
                     <a:solidFill>
-                      <a:srgbClr val="EC7000"/>
+                      <a:srgbClr val="FF6200"/>
                     </a:solidFill>
                     <a:lnL>
                       <a:noFill/>
@@ -8794,7 +8773,7 @@
                           </a:solidFill>
                           <a:latin typeface="Calibri"/>
                         </a:rPr>
-                        <a:t>Taxa média não localizada</a:t>
+                        <a:t>-</a:t>
                       </a:r>
                     </a:p>
                   </a:txBody>
@@ -9974,7 +9953,7 @@
                           </a:solidFill>
                           <a:latin typeface="Calibri"/>
                         </a:rPr>
-                        <a:t>Limite por idade não localizado</a:t>
+                        <a:t>-</a:t>
                       </a:r>
                     </a:p>
                   </a:txBody>
@@ -10023,7 +10002,7 @@
                           </a:solidFill>
                           <a:latin typeface="Calibri"/>
                         </a:rPr>
-                        <a:t>Limite por idade não localizado</a:t>
+                        <a:t>-</a:t>
                       </a:r>
                     </a:p>
                   </a:txBody>
@@ -10072,7 +10051,7 @@
                           </a:solidFill>
                           <a:latin typeface="Calibri"/>
                         </a:rPr>
-                        <a:t>Limite por idade não localizado</a:t>
+                        <a:t>-</a:t>
                       </a:r>
                     </a:p>
                   </a:txBody>
@@ -10109,8 +10088,8 @@
         </p:nvSpPr>
         <p:spPr>
           <a:xfrm>
-            <a:off x="438912" y="5632704"/>
-            <a:ext cx="11313871" cy="704088"/>
+            <a:off x="438912" y="5774436"/>
+            <a:ext cx="11313871" cy="562356"/>
           </a:xfrm>
           <a:prstGeom prst="rect">
             <a:avLst/>
@@ -10133,8 +10112,7 @@
               </a:rPr>
               <a:t>LTV na emissão da CCB: saldo presente / avaliação Molicar. Média ponderada; ponderador não explicitado.
 Ticket e Top 100 a valor presente, na aquisição. Limite por idade não localizado nos documentos acessíveis.
-Auto II: o regulamento prevê 1,90%–2,20% a.m. A DF de set/25 descreve 1,90%–2,05% a.m.; bases documentais distintas.
-Auto IV da imagem: proposta sem CNPJ ou documento de suporte. Condições não verificadas; fora desta carteira.</a:t>
+Auto II: o regulamento prevê 1,90%–2,20% a.m. A DF de set/25 descreve 1,90%–2,05% a.m.; bases documentais distintas.</a:t>
             </a:r>
           </a:p>
         </p:txBody>
@@ -10316,7 +10294,7 @@
                       <a:r>
                         <a:rPr sz="1300" b="1">
                           <a:solidFill>
-                            <a:srgbClr val="1F1F1F"/>
+                            <a:srgbClr val="FFFFFF"/>
                           </a:solidFill>
                           <a:latin typeface="Calibri"/>
                         </a:rPr>
@@ -10326,7 +10304,7 @@
                   </a:txBody>
                   <a:tcPr marL="91440" marR="91440" marT="41148" marB="41148" anchor="ctr">
                     <a:solidFill>
-                      <a:srgbClr val="EC7000"/>
+                      <a:srgbClr val="FF6200"/>
                     </a:solidFill>
                     <a:lnL>
                       <a:noFill/>
@@ -10365,7 +10343,7 @@
                       <a:r>
                         <a:rPr sz="1300" b="1">
                           <a:solidFill>
-                            <a:srgbClr val="1F1F1F"/>
+                            <a:srgbClr val="FFFFFF"/>
                           </a:solidFill>
                           <a:latin typeface="Calibri"/>
                         </a:rPr>
@@ -10375,7 +10353,7 @@
                   </a:txBody>
                   <a:tcPr marL="91440" marR="91440" marT="41148" marB="41148" anchor="ctr">
                     <a:solidFill>
-                      <a:srgbClr val="EC7000"/>
+                      <a:srgbClr val="FF6200"/>
                     </a:solidFill>
                     <a:lnL>
                       <a:noFill/>
@@ -10414,7 +10392,7 @@
                       <a:r>
                         <a:rPr sz="1300" b="1">
                           <a:solidFill>
-                            <a:srgbClr val="1F1F1F"/>
+                            <a:srgbClr val="FFFFFF"/>
                           </a:solidFill>
                           <a:latin typeface="Calibri"/>
                         </a:rPr>
@@ -10424,7 +10402,7 @@
                   </a:txBody>
                   <a:tcPr marL="91440" marR="91440" marT="41148" marB="41148" anchor="ctr">
                     <a:solidFill>
-                      <a:srgbClr val="EC7000"/>
+                      <a:srgbClr val="FF6200"/>
                     </a:solidFill>
                     <a:lnL>
                       <a:noFill/>
@@ -10463,7 +10441,7 @@
                       <a:r>
                         <a:rPr sz="1300" b="1">
                           <a:solidFill>
-                            <a:srgbClr val="1F1F1F"/>
+                            <a:srgbClr val="FFFFFF"/>
                           </a:solidFill>
                           <a:latin typeface="Calibri"/>
                         </a:rPr>
@@ -10473,7 +10451,7 @@
                   </a:txBody>
                   <a:tcPr marL="91440" marR="91440" marT="41148" marB="41148" anchor="ctr">
                     <a:solidFill>
-                      <a:srgbClr val="EC7000"/>
+                      <a:srgbClr val="FF6200"/>
                     </a:solidFill>
                     <a:lnL>
                       <a:noFill/>
@@ -12034,7 +12012,7 @@
         </p:nvGraphicFramePr>
         <p:xfrm>
           <a:off x="438912" y="932688"/>
-          <a:ext cx="11313870" cy="4636008"/>
+          <a:ext cx="11313870" cy="4448556"/>
         </p:xfrm>
         <a:graphic>
           <a:graphicData uri="http://schemas.openxmlformats.org/drawingml/2006/table">
@@ -12070,7 +12048,7 @@
                       <a:r>
                         <a:rPr sz="1300" b="1">
                           <a:solidFill>
-                            <a:srgbClr val="1F1F1F"/>
+                            <a:srgbClr val="FFFFFF"/>
                           </a:solidFill>
                           <a:latin typeface="Calibri"/>
                         </a:rPr>
@@ -12080,7 +12058,7 @@
                   </a:txBody>
                   <a:tcPr marL="91440" marR="91440" marT="41148" marB="41148" anchor="ctr">
                     <a:solidFill>
-                      <a:srgbClr val="EC7000"/>
+                      <a:srgbClr val="FF6200"/>
                     </a:solidFill>
                     <a:lnL>
                       <a:noFill/>
@@ -12119,7 +12097,7 @@
                       <a:r>
                         <a:rPr sz="1300" b="1">
                           <a:solidFill>
-                            <a:srgbClr val="1F1F1F"/>
+                            <a:srgbClr val="FFFFFF"/>
                           </a:solidFill>
                           <a:latin typeface="Calibri"/>
                         </a:rPr>
@@ -12129,7 +12107,7 @@
                   </a:txBody>
                   <a:tcPr marL="91440" marR="91440" marT="41148" marB="41148" anchor="ctr">
                     <a:solidFill>
-                      <a:srgbClr val="EC7000"/>
+                      <a:srgbClr val="FF6200"/>
                     </a:solidFill>
                     <a:lnL>
                       <a:noFill/>
@@ -12168,7 +12146,7 @@
                       <a:r>
                         <a:rPr sz="1300" b="1">
                           <a:solidFill>
-                            <a:srgbClr val="1F1F1F"/>
+                            <a:srgbClr val="FFFFFF"/>
                           </a:solidFill>
                           <a:latin typeface="Calibri"/>
                         </a:rPr>
@@ -12178,7 +12156,7 @@
                   </a:txBody>
                   <a:tcPr marL="91440" marR="91440" marT="41148" marB="41148" anchor="ctr">
                     <a:solidFill>
-                      <a:srgbClr val="EC7000"/>
+                      <a:srgbClr val="FF6200"/>
                     </a:solidFill>
                     <a:lnL>
                       <a:noFill/>
@@ -12217,7 +12195,7 @@
                       <a:r>
                         <a:rPr sz="1300" b="1">
                           <a:solidFill>
-                            <a:srgbClr val="1F1F1F"/>
+                            <a:srgbClr val="FFFFFF"/>
                           </a:solidFill>
                           <a:latin typeface="Calibri"/>
                         </a:rPr>
@@ -12227,7 +12205,7 @@
                   </a:txBody>
                   <a:tcPr marL="91440" marR="91440" marT="41148" marB="41148" anchor="ctr">
                     <a:solidFill>
-                      <a:srgbClr val="EC7000"/>
+                      <a:srgbClr val="FF6200"/>
                     </a:solidFill>
                     <a:lnL>
                       <a:noFill/>
@@ -14476,7 +14454,7 @@
                   </a:tcPr>
                 </a:tc>
               </a:tr>
-              <a:tr h="470916">
+              <a:tr h="283464">
                 <a:tc>
                   <a:txBody>
                     <a:bodyPr wrap="square">
@@ -14551,29 +14529,7 @@
                           </a:solidFill>
                           <a:latin typeface="Calibri"/>
                         </a:rPr>
-                        <a:t>Não localizado nos documentos</a:t>
-                      </a:r>
-                    </a:p>
-                    <a:p>
-                      <a:pPr algn="ctr">
-                        <a:lnSpc>
-                          <a:spcPct val="100000"/>
-                        </a:lnSpc>
-                        <a:spcBef>
-                          <a:spcPts val="0"/>
-                        </a:spcBef>
-                        <a:spcAft>
-                          <a:spcPts val="0"/>
-                        </a:spcAft>
-                      </a:pPr>
-                      <a:r>
-                        <a:rPr sz="1300" b="0">
-                          <a:solidFill>
-                            <a:srgbClr val="1F1F1F"/>
-                          </a:solidFill>
-                          <a:latin typeface="Calibri"/>
-                        </a:rPr>
-                        <a:t>acessíveis</a:t>
+                        <a:t>-</a:t>
                       </a:r>
                     </a:p>
                   </a:txBody>
@@ -14622,29 +14578,7 @@
                           </a:solidFill>
                           <a:latin typeface="Calibri"/>
                         </a:rPr>
-                        <a:t>Não localizado nos documentos</a:t>
-                      </a:r>
-                    </a:p>
-                    <a:p>
-                      <a:pPr algn="ctr">
-                        <a:lnSpc>
-                          <a:spcPct val="100000"/>
-                        </a:lnSpc>
-                        <a:spcBef>
-                          <a:spcPts val="0"/>
-                        </a:spcBef>
-                        <a:spcAft>
-                          <a:spcPts val="0"/>
-                        </a:spcAft>
-                      </a:pPr>
-                      <a:r>
-                        <a:rPr sz="1300" b="0">
-                          <a:solidFill>
-                            <a:srgbClr val="1F1F1F"/>
-                          </a:solidFill>
-                          <a:latin typeface="Calibri"/>
-                        </a:rPr>
-                        <a:t>acessíveis</a:t>
+                        <a:t>-</a:t>
                       </a:r>
                     </a:p>
                   </a:txBody>
@@ -14693,29 +14627,7 @@
                           </a:solidFill>
                           <a:latin typeface="Calibri"/>
                         </a:rPr>
-                        <a:t>Não localizado nos documentos</a:t>
-                      </a:r>
-                    </a:p>
-                    <a:p>
-                      <a:pPr algn="ctr">
-                        <a:lnSpc>
-                          <a:spcPct val="100000"/>
-                        </a:lnSpc>
-                        <a:spcBef>
-                          <a:spcPts val="0"/>
-                        </a:spcBef>
-                        <a:spcAft>
-                          <a:spcPts val="0"/>
-                        </a:spcAft>
-                      </a:pPr>
-                      <a:r>
-                        <a:rPr sz="1300" b="0">
-                          <a:solidFill>
-                            <a:srgbClr val="1F1F1F"/>
-                          </a:solidFill>
-                          <a:latin typeface="Calibri"/>
-                        </a:rPr>
-                        <a:t>acessíveis</a:t>
+                        <a:t>-</a:t>
                       </a:r>
                     </a:p>
                   </a:txBody>
@@ -14957,7 +14869,7 @@
                       <a:r>
                         <a:rPr sz="1300" b="1">
                           <a:solidFill>
-                            <a:srgbClr val="1F1F1F"/>
+                            <a:srgbClr val="FFFFFF"/>
                           </a:solidFill>
                           <a:latin typeface="Calibri"/>
                         </a:rPr>
@@ -14967,7 +14879,7 @@
                   </a:txBody>
                   <a:tcPr marL="91440" marR="91440" marT="41148" marB="41148" anchor="ctr">
                     <a:solidFill>
-                      <a:srgbClr val="EC7000"/>
+                      <a:srgbClr val="FF6200"/>
                     </a:solidFill>
                     <a:lnL>
                       <a:noFill/>
@@ -15006,7 +14918,7 @@
                       <a:r>
                         <a:rPr sz="1300" b="1">
                           <a:solidFill>
-                            <a:srgbClr val="1F1F1F"/>
+                            <a:srgbClr val="FFFFFF"/>
                           </a:solidFill>
                           <a:latin typeface="Calibri"/>
                         </a:rPr>
@@ -15016,7 +14928,7 @@
                   </a:txBody>
                   <a:tcPr marL="91440" marR="91440" marT="41148" marB="41148" anchor="ctr">
                     <a:solidFill>
-                      <a:srgbClr val="EC7000"/>
+                      <a:srgbClr val="FF6200"/>
                     </a:solidFill>
                     <a:lnL>
                       <a:noFill/>
@@ -15055,7 +14967,7 @@
                       <a:r>
                         <a:rPr sz="1300" b="1">
                           <a:solidFill>
-                            <a:srgbClr val="1F1F1F"/>
+                            <a:srgbClr val="FFFFFF"/>
                           </a:solidFill>
                           <a:latin typeface="Calibri"/>
                         </a:rPr>
@@ -15065,7 +14977,7 @@
                   </a:txBody>
                   <a:tcPr marL="91440" marR="91440" marT="41148" marB="41148" anchor="ctr">
                     <a:solidFill>
-                      <a:srgbClr val="EC7000"/>
+                      <a:srgbClr val="FF6200"/>
                     </a:solidFill>
                     <a:lnL>
                       <a:noFill/>
@@ -15104,7 +15016,7 @@
                       <a:r>
                         <a:rPr sz="1300" b="1">
                           <a:solidFill>
-                            <a:srgbClr val="1F1F1F"/>
+                            <a:srgbClr val="FFFFFF"/>
                           </a:solidFill>
                           <a:latin typeface="Calibri"/>
                         </a:rPr>
@@ -15114,7 +15026,7 @@
                   </a:txBody>
                   <a:tcPr marL="91440" marR="91440" marT="41148" marB="41148" anchor="ctr">
                     <a:solidFill>
-                      <a:srgbClr val="EC7000"/>
+                      <a:srgbClr val="FF6200"/>
                     </a:solidFill>
                     <a:lnL>
                       <a:noFill/>
@@ -16528,29 +16440,7 @@
                           </a:solidFill>
                           <a:latin typeface="Calibri"/>
                         </a:rPr>
-                        <a:t>Encerramento e distribuição não</a:t>
-                      </a:r>
-                    </a:p>
-                    <a:p>
-                      <a:pPr algn="ctr">
-                        <a:lnSpc>
-                          <a:spcPct val="100000"/>
-                        </a:lnSpc>
-                        <a:spcBef>
-                          <a:spcPts val="0"/>
-                        </a:spcBef>
-                        <a:spcAft>
-                          <a:spcPts val="0"/>
-                        </a:spcAft>
-                      </a:pPr>
-                      <a:r>
-                        <a:rPr sz="1300" b="0">
-                          <a:solidFill>
-                            <a:srgbClr val="1F1F1F"/>
-                          </a:solidFill>
-                          <a:latin typeface="Calibri"/>
-                        </a:rPr>
-                        <a:t>localizados</a:t>
+                        <a:t>-</a:t>
                       </a:r>
                     </a:p>
                   </a:txBody>
@@ -16651,28 +16541,6 @@
                         <a:t>DF set/25: cotas sem rating.</a:t>
                       </a:r>
                     </a:p>
-                    <a:p>
-                      <a:pPr algn="ctr">
-                        <a:lnSpc>
-                          <a:spcPct val="100000"/>
-                        </a:lnSpc>
-                        <a:spcBef>
-                          <a:spcPts val="0"/>
-                        </a:spcBef>
-                        <a:spcAft>
-                          <a:spcPts val="0"/>
-                        </a:spcAft>
-                      </a:pPr>
-                      <a:r>
-                        <a:rPr sz="1300" b="0">
-                          <a:solidFill>
-                            <a:srgbClr val="1F1F1F"/>
-                          </a:solidFill>
-                          <a:latin typeface="Calibri"/>
-                        </a:rPr>
-                        <a:t>Atualização não localizada</a:t>
-                      </a:r>
-                    </a:p>
                   </a:txBody>
                   <a:tcPr marL="91440" marR="91440" marT="41148" marB="41148" anchor="ctr">
                     <a:solidFill>
@@ -16720,28 +16588,6 @@
                           <a:latin typeface="Calibri"/>
                         </a:rPr>
                         <a:t>DF set/25: cotas sem rating.</a:t>
-                      </a:r>
-                    </a:p>
-                    <a:p>
-                      <a:pPr algn="ctr">
-                        <a:lnSpc>
-                          <a:spcPct val="100000"/>
-                        </a:lnSpc>
-                        <a:spcBef>
-                          <a:spcPts val="0"/>
-                        </a:spcBef>
-                        <a:spcAft>
-                          <a:spcPts val="0"/>
-                        </a:spcAft>
-                      </a:pPr>
-                      <a:r>
-                        <a:rPr sz="1300" b="0">
-                          <a:solidFill>
-                            <a:srgbClr val="1F1F1F"/>
-                          </a:solidFill>
-                          <a:latin typeface="Calibri"/>
-                        </a:rPr>
-                        <a:t>Atualização não localizada</a:t>
                       </a:r>
                     </a:p>
                   </a:txBody>
@@ -17018,7 +16864,7 @@
         </p:nvGraphicFramePr>
         <p:xfrm>
           <a:off x="438912" y="932688"/>
-          <a:ext cx="11313870" cy="4443984"/>
+          <a:ext cx="11313870" cy="3881628"/>
         </p:xfrm>
         <a:graphic>
           <a:graphicData uri="http://schemas.openxmlformats.org/drawingml/2006/table">
@@ -17054,7 +16900,7 @@
                       <a:r>
                         <a:rPr sz="1300" b="1">
                           <a:solidFill>
-                            <a:srgbClr val="1F1F1F"/>
+                            <a:srgbClr val="FFFFFF"/>
                           </a:solidFill>
                           <a:latin typeface="Calibri"/>
                         </a:rPr>
@@ -17064,7 +16910,7 @@
                   </a:txBody>
                   <a:tcPr marL="91440" marR="91440" marT="41148" marB="41148" anchor="ctr">
                     <a:solidFill>
-                      <a:srgbClr val="EC7000"/>
+                      <a:srgbClr val="FF6200"/>
                     </a:solidFill>
                     <a:lnL>
                       <a:noFill/>
@@ -17103,7 +16949,7 @@
                       <a:r>
                         <a:rPr sz="1300" b="1">
                           <a:solidFill>
-                            <a:srgbClr val="1F1F1F"/>
+                            <a:srgbClr val="FFFFFF"/>
                           </a:solidFill>
                           <a:latin typeface="Calibri"/>
                         </a:rPr>
@@ -17113,7 +16959,7 @@
                   </a:txBody>
                   <a:tcPr marL="91440" marR="91440" marT="41148" marB="41148" anchor="ctr">
                     <a:solidFill>
-                      <a:srgbClr val="EC7000"/>
+                      <a:srgbClr val="FF6200"/>
                     </a:solidFill>
                     <a:lnL>
                       <a:noFill/>
@@ -17152,7 +16998,7 @@
                       <a:r>
                         <a:rPr sz="1300" b="1">
                           <a:solidFill>
-                            <a:srgbClr val="1F1F1F"/>
+                            <a:srgbClr val="FFFFFF"/>
                           </a:solidFill>
                           <a:latin typeface="Calibri"/>
                         </a:rPr>
@@ -17162,7 +17008,7 @@
                   </a:txBody>
                   <a:tcPr marL="91440" marR="91440" marT="41148" marB="41148" anchor="ctr">
                     <a:solidFill>
-                      <a:srgbClr val="EC7000"/>
+                      <a:srgbClr val="FF6200"/>
                     </a:solidFill>
                     <a:lnL>
                       <a:noFill/>
@@ -17201,7 +17047,7 @@
                       <a:r>
                         <a:rPr sz="1300" b="1">
                           <a:solidFill>
-                            <a:srgbClr val="1F1F1F"/>
+                            <a:srgbClr val="FFFFFF"/>
                           </a:solidFill>
                           <a:latin typeface="Calibri"/>
                         </a:rPr>
@@ -17211,7 +17057,7 @@
                   </a:txBody>
                   <a:tcPr marL="91440" marR="91440" marT="41148" marB="41148" anchor="ctr">
                     <a:solidFill>
-                      <a:srgbClr val="EC7000"/>
+                      <a:srgbClr val="FF6200"/>
                     </a:solidFill>
                     <a:lnL>
                       <a:noFill/>
@@ -17230,7 +17076,7 @@
                   </a:tcPr>
                 </a:tc>
               </a:tr>
-              <a:tr h="658368">
+              <a:tr h="283464">
                 <a:tc>
                   <a:txBody>
                     <a:bodyPr wrap="square">
@@ -17350,51 +17196,7 @@
                           </a:solidFill>
                           <a:latin typeface="Calibri"/>
                         </a:rPr>
-                        <a:t>Data por subclasse não</a:t>
-                      </a:r>
-                    </a:p>
-                    <a:p>
-                      <a:pPr algn="ctr">
-                        <a:lnSpc>
-                          <a:spcPct val="100000"/>
-                        </a:lnSpc>
-                        <a:spcBef>
-                          <a:spcPts val="0"/>
-                        </a:spcBef>
-                        <a:spcAft>
-                          <a:spcPts val="0"/>
-                        </a:spcAft>
-                      </a:pPr>
-                      <a:r>
-                        <a:rPr sz="1300" b="0">
-                          <a:solidFill>
-                            <a:srgbClr val="1F1F1F"/>
-                          </a:solidFill>
-                          <a:latin typeface="Calibri"/>
-                        </a:rPr>
-                        <a:t>localizada. DF: atividades em</a:t>
-                      </a:r>
-                    </a:p>
-                    <a:p>
-                      <a:pPr algn="ctr">
-                        <a:lnSpc>
-                          <a:spcPct val="100000"/>
-                        </a:lnSpc>
-                        <a:spcBef>
-                          <a:spcPts val="0"/>
-                        </a:spcBef>
-                        <a:spcAft>
-                          <a:spcPts val="0"/>
-                        </a:spcAft>
-                      </a:pPr>
-                      <a:r>
-                        <a:rPr sz="1300" b="0">
-                          <a:solidFill>
-                            <a:srgbClr val="1F1F1F"/>
-                          </a:solidFill>
-                          <a:latin typeface="Calibri"/>
-                        </a:rPr>
-                        <a:t>02/07/2025</a:t>
+                        <a:t>DF: atividades em 02/07/2025</a:t>
                       </a:r>
                     </a:p>
                   </a:txBody>
@@ -17422,28 +17224,6 @@
                       <a:noAutofit/>
                     </a:bodyPr>
                     <a:lstStyle/>
-                    <a:p>
-                      <a:pPr algn="ctr">
-                        <a:lnSpc>
-                          <a:spcPct val="100000"/>
-                        </a:lnSpc>
-                        <a:spcBef>
-                          <a:spcPts val="0"/>
-                        </a:spcBef>
-                        <a:spcAft>
-                          <a:spcPts val="0"/>
-                        </a:spcAft>
-                      </a:pPr>
-                      <a:r>
-                        <a:rPr sz="1300" b="0">
-                          <a:solidFill>
-                            <a:srgbClr val="1F1F1F"/>
-                          </a:solidFill>
-                          <a:latin typeface="Calibri"/>
-                        </a:rPr>
-                        <a:t>Efetiva não confirmada.</a:t>
-                      </a:r>
-                    </a:p>
                     <a:p>
                       <a:pPr algn="ctr">
                         <a:lnSpc>
@@ -18656,7 +18436,7 @@
                   </a:tcPr>
                 </a:tc>
               </a:tr>
-              <a:tr h="470916">
+              <a:tr h="283464">
                 <a:tc>
                   <a:txBody>
                     <a:bodyPr wrap="square">
@@ -18729,29 +18509,7 @@
                           </a:solidFill>
                           <a:latin typeface="Calibri"/>
                         </a:rPr>
-                        <a:t>Data fechada por subclasse não</a:t>
-                      </a:r>
-                    </a:p>
-                    <a:p>
-                      <a:pPr algn="ctr">
-                        <a:lnSpc>
-                          <a:spcPct val="100000"/>
-                        </a:lnSpc>
-                        <a:spcBef>
-                          <a:spcPts val="0"/>
-                        </a:spcBef>
-                        <a:spcAft>
-                          <a:spcPts val="0"/>
-                        </a:spcAft>
-                      </a:pPr>
-                      <a:r>
-                        <a:rPr sz="1300" b="0">
-                          <a:solidFill>
-                            <a:srgbClr val="1F1F1F"/>
-                          </a:solidFill>
-                          <a:latin typeface="Calibri"/>
-                        </a:rPr>
-                        <a:t>localizada</a:t>
+                        <a:t>-</a:t>
                       </a:r>
                     </a:p>
                   </a:txBody>
@@ -18798,29 +18556,7 @@
                           </a:solidFill>
                           <a:latin typeface="Calibri"/>
                         </a:rPr>
-                        <a:t>Data fechada por subclasse não</a:t>
-                      </a:r>
-                    </a:p>
-                    <a:p>
-                      <a:pPr algn="ctr">
-                        <a:lnSpc>
-                          <a:spcPct val="100000"/>
-                        </a:lnSpc>
-                        <a:spcBef>
-                          <a:spcPts val="0"/>
-                        </a:spcBef>
-                        <a:spcAft>
-                          <a:spcPts val="0"/>
-                        </a:spcAft>
-                      </a:pPr>
-                      <a:r>
-                        <a:rPr sz="1300" b="0">
-                          <a:solidFill>
-                            <a:srgbClr val="1F1F1F"/>
-                          </a:solidFill>
-                          <a:latin typeface="Calibri"/>
-                        </a:rPr>
-                        <a:t>localizada</a:t>
+                        <a:t>-</a:t>
                       </a:r>
                     </a:p>
                   </a:txBody>
@@ -18867,29 +18603,7 @@
                           </a:solidFill>
                           <a:latin typeface="Calibri"/>
                         </a:rPr>
-                        <a:t>Data fechada por subclasse não</a:t>
-                      </a:r>
-                    </a:p>
-                    <a:p>
-                      <a:pPr algn="ctr">
-                        <a:lnSpc>
-                          <a:spcPct val="100000"/>
-                        </a:lnSpc>
-                        <a:spcBef>
-                          <a:spcPts val="0"/>
-                        </a:spcBef>
-                        <a:spcAft>
-                          <a:spcPts val="0"/>
-                        </a:spcAft>
-                      </a:pPr>
-                      <a:r>
-                        <a:rPr sz="1300" b="0">
-                          <a:solidFill>
-                            <a:srgbClr val="1F1F1F"/>
-                          </a:solidFill>
-                          <a:latin typeface="Calibri"/>
-                        </a:rPr>
-                        <a:t>localizada</a:t>
+                        <a:t>-</a:t>
                       </a:r>
                     </a:p>
                   </a:txBody>
@@ -18985,7 +18699,7 @@
                           </a:solidFill>
                           <a:latin typeface="Calibri"/>
                         </a:rPr>
-                        <a:t>Valores por data não localizados</a:t>
+                        <a:t>-</a:t>
                       </a:r>
                     </a:p>
                   </a:txBody>
@@ -19032,7 +18746,7 @@
                           </a:solidFill>
                           <a:latin typeface="Calibri"/>
                         </a:rPr>
-                        <a:t>Valores por data não localizados</a:t>
+                        <a:t>-</a:t>
                       </a:r>
                     </a:p>
                   </a:txBody>
@@ -19079,7 +18793,7 @@
                           </a:solidFill>
                           <a:latin typeface="Calibri"/>
                         </a:rPr>
-                        <a:t>Valores por data não localizados</a:t>
+                        <a:t>-</a:t>
                       </a:r>
                     </a:p>
                   </a:txBody>
@@ -19605,7 +19319,7 @@
                       <a:r>
                         <a:rPr sz="1300" b="1">
                           <a:solidFill>
-                            <a:srgbClr val="1F1F1F"/>
+                            <a:srgbClr val="FFFFFF"/>
                           </a:solidFill>
                           <a:latin typeface="Calibri"/>
                         </a:rPr>
@@ -19615,7 +19329,7 @@
                   </a:txBody>
                   <a:tcPr marL="91440" marR="91440" marT="41148" marB="41148" anchor="ctr">
                     <a:solidFill>
-                      <a:srgbClr val="EC7000"/>
+                      <a:srgbClr val="FF6200"/>
                     </a:solidFill>
                     <a:lnL>
                       <a:noFill/>
@@ -19654,7 +19368,7 @@
                       <a:r>
                         <a:rPr sz="1300" b="1">
                           <a:solidFill>
-                            <a:srgbClr val="1F1F1F"/>
+                            <a:srgbClr val="FFFFFF"/>
                           </a:solidFill>
                           <a:latin typeface="Calibri"/>
                         </a:rPr>
@@ -19664,7 +19378,7 @@
                   </a:txBody>
                   <a:tcPr marL="91440" marR="91440" marT="41148" marB="41148" anchor="ctr">
                     <a:solidFill>
-                      <a:srgbClr val="EC7000"/>
+                      <a:srgbClr val="FF6200"/>
                     </a:solidFill>
                     <a:lnL>
                       <a:noFill/>
@@ -19703,7 +19417,7 @@
                       <a:r>
                         <a:rPr sz="1300" b="1">
                           <a:solidFill>
-                            <a:srgbClr val="1F1F1F"/>
+                            <a:srgbClr val="FFFFFF"/>
                           </a:solidFill>
                           <a:latin typeface="Calibri"/>
                         </a:rPr>
@@ -19713,7 +19427,7 @@
                   </a:txBody>
                   <a:tcPr marL="91440" marR="91440" marT="41148" marB="41148" anchor="ctr">
                     <a:solidFill>
-                      <a:srgbClr val="EC7000"/>
+                      <a:srgbClr val="FF6200"/>
                     </a:solidFill>
                     <a:lnL>
                       <a:noFill/>
@@ -19752,7 +19466,7 @@
                       <a:r>
                         <a:rPr sz="1300" b="1">
                           <a:solidFill>
-                            <a:srgbClr val="1F1F1F"/>
+                            <a:srgbClr val="FFFFFF"/>
                           </a:solidFill>
                           <a:latin typeface="Calibri"/>
                         </a:rPr>
@@ -19762,7 +19476,7 @@
                   </a:txBody>
                   <a:tcPr marL="91440" marR="91440" marT="41148" marB="41148" anchor="ctr">
                     <a:solidFill>
-                      <a:srgbClr val="EC7000"/>
+                      <a:srgbClr val="FF6200"/>
                     </a:solidFill>
                     <a:lnL>
                       <a:noFill/>
@@ -21672,29 +21386,7 @@
                           </a:solidFill>
                           <a:latin typeface="Calibri"/>
                         </a:rPr>
-                        <a:t>Remetido ao CCCB. Taxa final não</a:t>
-                      </a:r>
-                    </a:p>
-                    <a:p>
-                      <a:pPr algn="ctr">
-                        <a:lnSpc>
-                          <a:spcPct val="100000"/>
-                        </a:lnSpc>
-                        <a:spcBef>
-                          <a:spcPts val="0"/>
-                        </a:spcBef>
-                        <a:spcAft>
-                          <a:spcPts val="0"/>
-                        </a:spcAft>
-                      </a:pPr>
-                      <a:r>
-                        <a:rPr sz="1300" b="0">
-                          <a:solidFill>
-                            <a:srgbClr val="1F1F1F"/>
-                          </a:solidFill>
-                          <a:latin typeface="Calibri"/>
-                        </a:rPr>
-                        <a:t>localizada</a:t>
+                        <a:t>-</a:t>
                       </a:r>
                     </a:p>
                   </a:txBody>
@@ -21936,7 +21628,7 @@
                       <a:r>
                         <a:rPr sz="1300" b="1">
                           <a:solidFill>
-                            <a:srgbClr val="1F1F1F"/>
+                            <a:srgbClr val="FFFFFF"/>
                           </a:solidFill>
                           <a:latin typeface="Calibri"/>
                         </a:rPr>
@@ -21946,7 +21638,7 @@
                   </a:txBody>
                   <a:tcPr marL="91440" marR="91440" marT="41148" marB="41148" anchor="ctr">
                     <a:solidFill>
-                      <a:srgbClr val="EC7000"/>
+                      <a:srgbClr val="FF6200"/>
                     </a:solidFill>
                     <a:lnL>
                       <a:noFill/>
@@ -21985,7 +21677,7 @@
                       <a:r>
                         <a:rPr sz="1300" b="1">
                           <a:solidFill>
-                            <a:srgbClr val="1F1F1F"/>
+                            <a:srgbClr val="FFFFFF"/>
                           </a:solidFill>
                           <a:latin typeface="Calibri"/>
                         </a:rPr>
@@ -21995,7 +21687,7 @@
                   </a:txBody>
                   <a:tcPr marL="91440" marR="91440" marT="41148" marB="41148" anchor="ctr">
                     <a:solidFill>
-                      <a:srgbClr val="EC7000"/>
+                      <a:srgbClr val="FF6200"/>
                     </a:solidFill>
                     <a:lnL>
                       <a:noFill/>
@@ -22034,7 +21726,7 @@
                       <a:r>
                         <a:rPr sz="1300" b="1">
                           <a:solidFill>
-                            <a:srgbClr val="1F1F1F"/>
+                            <a:srgbClr val="FFFFFF"/>
                           </a:solidFill>
                           <a:latin typeface="Calibri"/>
                         </a:rPr>
@@ -22044,7 +21736,7 @@
                   </a:txBody>
                   <a:tcPr marL="91440" marR="91440" marT="41148" marB="41148" anchor="ctr">
                     <a:solidFill>
-                      <a:srgbClr val="EC7000"/>
+                      <a:srgbClr val="FF6200"/>
                     </a:solidFill>
                     <a:lnL>
                       <a:noFill/>
@@ -22083,7 +21775,7 @@
                       <a:r>
                         <a:rPr sz="1300" b="1">
                           <a:solidFill>
-                            <a:srgbClr val="1F1F1F"/>
+                            <a:srgbClr val="FFFFFF"/>
                           </a:solidFill>
                           <a:latin typeface="Calibri"/>
                         </a:rPr>
@@ -22093,7 +21785,7 @@
                   </a:txBody>
                   <a:tcPr marL="91440" marR="91440" marT="41148" marB="41148" anchor="ctr">
                     <a:solidFill>
-                      <a:srgbClr val="EC7000"/>
+                      <a:srgbClr val="FF6200"/>
                     </a:solidFill>
                     <a:lnL>
                       <a:noFill/>
@@ -22763,29 +22455,29 @@
                           </a:solidFill>
                           <a:latin typeface="Calibri"/>
                         </a:rPr>
-                        <a:t>Proxy por cotas. Confirmar</a:t>
-                      </a:r>
-                    </a:p>
-                    <a:p>
-                      <a:pPr algn="ctr">
-                        <a:lnSpc>
-                          <a:spcPct val="100000"/>
-                        </a:lnSpc>
-                        <a:spcBef>
-                          <a:spcPts val="0"/>
-                        </a:spcBef>
-                        <a:spcAft>
-                          <a:spcPts val="0"/>
-                        </a:spcAft>
-                      </a:pPr>
-                      <a:r>
-                        <a:rPr sz="1300" b="0">
-                          <a:solidFill>
-                            <a:srgbClr val="1F1F1F"/>
-                          </a:solidFill>
-                          <a:latin typeface="Calibri"/>
-                        </a:rPr>
-                        <a:t>divergência 15% / dez</a:t>
+                        <a:t>Proxy por cotas; Divergência 15%</a:t>
+                      </a:r>
+                    </a:p>
+                    <a:p>
+                      <a:pPr algn="ctr">
+                        <a:lnSpc>
+                          <a:spcPct val="100000"/>
+                        </a:lnSpc>
+                        <a:spcBef>
+                          <a:spcPts val="0"/>
+                        </a:spcBef>
+                        <a:spcAft>
+                          <a:spcPts val="0"/>
+                        </a:spcAft>
+                      </a:pPr>
+                      <a:r>
+                        <a:rPr sz="1300" b="0">
+                          <a:solidFill>
+                            <a:srgbClr val="1F1F1F"/>
+                          </a:solidFill>
+                          <a:latin typeface="Calibri"/>
+                        </a:rPr>
+                        <a:t>/ dez</a:t>
                       </a:r>
                     </a:p>
                   </a:txBody>
@@ -22832,29 +22524,29 @@
                           </a:solidFill>
                           <a:latin typeface="Calibri"/>
                         </a:rPr>
-                        <a:t>Proxy por cotas. Confirmar</a:t>
-                      </a:r>
-                    </a:p>
-                    <a:p>
-                      <a:pPr algn="ctr">
-                        <a:lnSpc>
-                          <a:spcPct val="100000"/>
-                        </a:lnSpc>
-                        <a:spcBef>
-                          <a:spcPts val="0"/>
-                        </a:spcBef>
-                        <a:spcAft>
-                          <a:spcPts val="0"/>
-                        </a:spcAft>
-                      </a:pPr>
-                      <a:r>
-                        <a:rPr sz="1300" b="0">
-                          <a:solidFill>
-                            <a:srgbClr val="1F1F1F"/>
-                          </a:solidFill>
-                          <a:latin typeface="Calibri"/>
-                        </a:rPr>
-                        <a:t>divergência 15% / dez</a:t>
+                        <a:t>Proxy por cotas; Divergência 15%</a:t>
+                      </a:r>
+                    </a:p>
+                    <a:p>
+                      <a:pPr algn="ctr">
+                        <a:lnSpc>
+                          <a:spcPct val="100000"/>
+                        </a:lnSpc>
+                        <a:spcBef>
+                          <a:spcPts val="0"/>
+                        </a:spcBef>
+                        <a:spcAft>
+                          <a:spcPts val="0"/>
+                        </a:spcAft>
+                      </a:pPr>
+                      <a:r>
+                        <a:rPr sz="1300" b="0">
+                          <a:solidFill>
+                            <a:srgbClr val="1F1F1F"/>
+                          </a:solidFill>
+                          <a:latin typeface="Calibri"/>
+                        </a:rPr>
+                        <a:t>/ dez</a:t>
                       </a:r>
                     </a:p>
                   </a:txBody>
@@ -23748,7 +23440,7 @@
                       <a:r>
                         <a:rPr sz="1300" b="1">
                           <a:solidFill>
-                            <a:srgbClr val="1F1F1F"/>
+                            <a:srgbClr val="FFFFFF"/>
                           </a:solidFill>
                           <a:latin typeface="Calibri"/>
                         </a:rPr>
@@ -23758,7 +23450,7 @@
                   </a:txBody>
                   <a:tcPr marL="91440" marR="91440" marT="41148" marB="41148" anchor="ctr">
                     <a:solidFill>
-                      <a:srgbClr val="EC7000"/>
+                      <a:srgbClr val="FF6200"/>
                     </a:solidFill>
                     <a:lnL>
                       <a:noFill/>
@@ -23797,7 +23489,7 @@
                       <a:r>
                         <a:rPr sz="1300" b="1">
                           <a:solidFill>
-                            <a:srgbClr val="1F1F1F"/>
+                            <a:srgbClr val="FFFFFF"/>
                           </a:solidFill>
                           <a:latin typeface="Calibri"/>
                         </a:rPr>
@@ -23807,7 +23499,7 @@
                   </a:txBody>
                   <a:tcPr marL="91440" marR="91440" marT="41148" marB="41148" anchor="ctr">
                     <a:solidFill>
-                      <a:srgbClr val="EC7000"/>
+                      <a:srgbClr val="FF6200"/>
                     </a:solidFill>
                     <a:lnL>
                       <a:noFill/>
@@ -23846,7 +23538,7 @@
                       <a:r>
                         <a:rPr sz="1300" b="1">
                           <a:solidFill>
-                            <a:srgbClr val="1F1F1F"/>
+                            <a:srgbClr val="FFFFFF"/>
                           </a:solidFill>
                           <a:latin typeface="Calibri"/>
                         </a:rPr>
@@ -23856,7 +23548,7 @@
                   </a:txBody>
                   <a:tcPr marL="91440" marR="91440" marT="41148" marB="41148" anchor="ctr">
                     <a:solidFill>
-                      <a:srgbClr val="EC7000"/>
+                      <a:srgbClr val="FF6200"/>
                     </a:solidFill>
                     <a:lnL>
                       <a:noFill/>
@@ -23895,7 +23587,7 @@
                       <a:r>
                         <a:rPr sz="1300" b="1">
                           <a:solidFill>
-                            <a:srgbClr val="1F1F1F"/>
+                            <a:srgbClr val="FFFFFF"/>
                           </a:solidFill>
                           <a:latin typeface="Calibri"/>
                         </a:rPr>
@@ -23905,7 +23597,7 @@
                   </a:txBody>
                   <a:tcPr marL="91440" marR="91440" marT="41148" marB="41148" anchor="ctr">
                     <a:solidFill>
-                      <a:srgbClr val="EC7000"/>
+                      <a:srgbClr val="FF6200"/>
                     </a:solidFill>
                     <a:lnL>
                       <a:noFill/>
@@ -25133,29 +24825,7 @@
                           </a:solidFill>
                           <a:latin typeface="Calibri"/>
                         </a:rPr>
-                        <a:t>Sem competência IME carregada na</a:t>
-                      </a:r>
-                    </a:p>
-                    <a:p>
-                      <a:pPr algn="ctr">
-                        <a:lnSpc>
-                          <a:spcPct val="100000"/>
-                        </a:lnSpc>
-                        <a:spcBef>
-                          <a:spcPts val="0"/>
-                        </a:spcBef>
-                        <a:spcAft>
-                          <a:spcPts val="0"/>
-                        </a:spcAft>
-                      </a:pPr>
-                      <a:r>
-                        <a:rPr sz="1300" b="0">
-                          <a:solidFill>
-                            <a:srgbClr val="1F1F1F"/>
-                          </a:solidFill>
-                          <a:latin typeface="Calibri"/>
-                        </a:rPr>
-                        <a:t>curadoria documental</a:t>
+                        <a:t>-</a:t>
                       </a:r>
                     </a:p>
                   </a:txBody>
@@ -25204,29 +24874,7 @@
                           </a:solidFill>
                           <a:latin typeface="Calibri"/>
                         </a:rPr>
-                        <a:t>Sem competência IME carregada na</a:t>
-                      </a:r>
-                    </a:p>
-                    <a:p>
-                      <a:pPr algn="ctr">
-                        <a:lnSpc>
-                          <a:spcPct val="100000"/>
-                        </a:lnSpc>
-                        <a:spcBef>
-                          <a:spcPts val="0"/>
-                        </a:spcBef>
-                        <a:spcAft>
-                          <a:spcPts val="0"/>
-                        </a:spcAft>
-                      </a:pPr>
-                      <a:r>
-                        <a:rPr sz="1300" b="0">
-                          <a:solidFill>
-                            <a:srgbClr val="1F1F1F"/>
-                          </a:solidFill>
-                          <a:latin typeface="Calibri"/>
-                        </a:rPr>
-                        <a:t>curadoria documental</a:t>
+                        <a:t>-</a:t>
                       </a:r>
                     </a:p>
                   </a:txBody>
@@ -25275,29 +24923,7 @@
                           </a:solidFill>
                           <a:latin typeface="Calibri"/>
                         </a:rPr>
-                        <a:t>Sem competência IME carregada na</a:t>
-                      </a:r>
-                    </a:p>
-                    <a:p>
-                      <a:pPr algn="ctr">
-                        <a:lnSpc>
-                          <a:spcPct val="100000"/>
-                        </a:lnSpc>
-                        <a:spcBef>
-                          <a:spcPts val="0"/>
-                        </a:spcBef>
-                        <a:spcAft>
-                          <a:spcPts val="0"/>
-                        </a:spcAft>
-                      </a:pPr>
-                      <a:r>
-                        <a:rPr sz="1300" b="0">
-                          <a:solidFill>
-                            <a:srgbClr val="1F1F1F"/>
-                          </a:solidFill>
-                          <a:latin typeface="Calibri"/>
-                        </a:rPr>
-                        <a:t>curadoria documental</a:t>
+                        <a:t>-</a:t>
                       </a:r>
                     </a:p>
                   </a:txBody>
